--- a/docs/genoffice-web-roadmap/evidence/joint-run/work/slides-small.pptx
+++ b/docs/genoffice-web-roadmap/evidence/joint-run/work/slides-small.pptx
@@ -69,7 +69,7 @@
           <p:cNvPr id="2" name="Title">
             <a:extLst>
               <a:ext uri="{FF2B5EF4-FFF2-40B4-BE49-F238E27FC236}">
-                <a16:creationId xmlns:a16="http://schemas.microsoft.com/office/drawing/2014/main" id="{D2DF52D0-93AB-43BE-BD58-39C17B0D223F}"/>
+                <a16:creationId xmlns:a16="http://schemas.microsoft.com/office/drawing/2014/main" id="{3BAF479D-09D2-4E4C-9F71-800559FBD8E4}"/>
               </a:ext>
             </a:extLst>
           </p:cNvPr>
